--- a/Pyrkov.pptx
+++ b/Pyrkov.pptx
@@ -6172,10 +6172,10 @@
         </p:nvGrpSpPr>
         <p:grpSpPr>
           <a:xfrm rot="0">
-            <a:off x="6500117" y="2789053"/>
-            <a:ext cx="2402824" cy="751570"/>
+            <a:off x="9194762" y="2789053"/>
+            <a:ext cx="2402824" cy="751568"/>
             <a:chOff x="0" y="0"/>
-            <a:chExt cx="3203766" cy="1002094"/>
+            <a:chExt cx="3203766" cy="1002091"/>
           </a:xfrm>
         </p:grpSpPr>
         <p:sp>
@@ -6187,7 +6187,7 @@
           <p:spPr>
             <a:xfrm flipH="false" flipV="false" rot="0">
               <a:off x="0" y="0"/>
-              <a:ext cx="3203702" cy="1002030"/>
+              <a:ext cx="3203702" cy="1002028"/>
             </a:xfrm>
             <a:custGeom>
               <a:avLst/>
@@ -6196,7 +6196,7 @@
               <a:cxnLst/>
               <a:rect r="r" b="b" t="t" l="l"/>
               <a:pathLst>
-                <a:path h="1002030" w="3203702">
+                <a:path h="1002028" w="3203702">
                   <a:moveTo>
                     <a:pt x="0" y="0"/>
                   </a:moveTo>
@@ -6204,10 +6204,10 @@
                     <a:pt x="3203702" y="0"/>
                   </a:lnTo>
                   <a:lnTo>
-                    <a:pt x="3203702" y="1002030"/>
-                  </a:lnTo>
-                  <a:lnTo>
-                    <a:pt x="0" y="1002030"/>
+                    <a:pt x="3203702" y="1002028"/>
+                  </a:lnTo>
+                  <a:lnTo>
+                    <a:pt x="0" y="1002028"/>
                   </a:lnTo>
                   <a:close/>
                 </a:path>
@@ -6227,10 +6227,10 @@
         </p:nvGrpSpPr>
         <p:grpSpPr>
           <a:xfrm rot="0">
-            <a:off x="6500117" y="2752896"/>
-            <a:ext cx="2402824" cy="787737"/>
+            <a:off x="9194762" y="2807137"/>
+            <a:ext cx="2402824" cy="733485"/>
             <a:chOff x="0" y="0"/>
-            <a:chExt cx="3203766" cy="1050315"/>
+            <a:chExt cx="3203766" cy="977980"/>
           </a:xfrm>
         </p:grpSpPr>
         <p:sp>
@@ -6242,7 +6242,7 @@
           <p:spPr>
             <a:xfrm flipH="false" flipV="false" rot="0">
               <a:off x="0" y="0"/>
-              <a:ext cx="3203763" cy="1050311"/>
+              <a:ext cx="3203763" cy="977976"/>
             </a:xfrm>
             <a:custGeom>
               <a:avLst/>
@@ -6251,7 +6251,7 @@
               <a:cxnLst/>
               <a:rect r="r" b="b" t="t" l="l"/>
               <a:pathLst>
-                <a:path h="1050311" w="3203763">
+                <a:path h="977976" w="3203763">
                   <a:moveTo>
                     <a:pt x="0" y="0"/>
                   </a:moveTo>
@@ -6259,10 +6259,10 @@
                     <a:pt x="3203763" y="0"/>
                   </a:lnTo>
                   <a:lnTo>
-                    <a:pt x="3203763" y="1050311"/>
-                  </a:lnTo>
-                  <a:lnTo>
-                    <a:pt x="0" y="1050311"/>
+                    <a:pt x="3203763" y="977976"/>
+                  </a:lnTo>
+                  <a:lnTo>
+                    <a:pt x="0" y="977976"/>
                   </a:lnTo>
                   <a:close/>
                 </a:path>
@@ -6273,7 +6273,7 @@
                 <a:alphaModFix amt="0"/>
               </a:blip>
               <a:stretch>
-                <a:fillRect l="0" t="-9435" r="0" b="-9435"/>
+                <a:fillRect l="0" t="-10132" r="0" b="-17529"/>
               </a:stretch>
             </a:blipFill>
           </p:spPr>
@@ -6287,7 +6287,7 @@
           <p:spPr>
             <a:xfrm>
               <a:off x="0" y="-9525"/>
-              <a:ext cx="3203766" cy="1059840"/>
+              <a:ext cx="3203766" cy="987505"/>
             </a:xfrm>
             <a:prstGeom prst="rect">
               <a:avLst/>
@@ -6326,10 +6326,10 @@
         </p:nvGrpSpPr>
         <p:grpSpPr>
           <a:xfrm rot="0">
-            <a:off x="9007716" y="2789053"/>
-            <a:ext cx="2587876" cy="751570"/>
+            <a:off x="11746221" y="2789042"/>
+            <a:ext cx="2587876" cy="751580"/>
             <a:chOff x="0" y="0"/>
-            <a:chExt cx="3450501" cy="1002094"/>
+            <a:chExt cx="3450501" cy="1002106"/>
           </a:xfrm>
         </p:grpSpPr>
         <p:sp>
@@ -6341,7 +6341,7 @@
           <p:spPr>
             <a:xfrm flipH="false" flipV="false" rot="0">
               <a:off x="0" y="0"/>
-              <a:ext cx="3450463" cy="1002030"/>
+              <a:ext cx="3450463" cy="1002043"/>
             </a:xfrm>
             <a:custGeom>
               <a:avLst/>
@@ -6350,7 +6350,7 @@
               <a:cxnLst/>
               <a:rect r="r" b="b" t="t" l="l"/>
               <a:pathLst>
-                <a:path h="1002030" w="3450463">
+                <a:path h="1002043" w="3450463">
                   <a:moveTo>
                     <a:pt x="0" y="0"/>
                   </a:moveTo>
@@ -6358,10 +6358,10 @@
                     <a:pt x="3450463" y="0"/>
                   </a:lnTo>
                   <a:lnTo>
-                    <a:pt x="3450463" y="1002030"/>
-                  </a:lnTo>
-                  <a:lnTo>
-                    <a:pt x="0" y="1002030"/>
+                    <a:pt x="3450463" y="1002043"/>
+                  </a:lnTo>
+                  <a:lnTo>
+                    <a:pt x="0" y="1002043"/>
                   </a:lnTo>
                   <a:close/>
                 </a:path>
@@ -6381,10 +6381,10 @@
         </p:nvGrpSpPr>
         <p:grpSpPr>
           <a:xfrm rot="0">
-            <a:off x="9007716" y="2752896"/>
-            <a:ext cx="2587876" cy="787737"/>
+            <a:off x="6475733" y="2752889"/>
+            <a:ext cx="2531983" cy="787733"/>
             <a:chOff x="0" y="0"/>
-            <a:chExt cx="3450501" cy="1050315"/>
+            <a:chExt cx="3375978" cy="1050311"/>
           </a:xfrm>
         </p:grpSpPr>
         <p:sp>
@@ -6396,7 +6396,7 @@
           <p:spPr>
             <a:xfrm flipH="false" flipV="false" rot="0">
               <a:off x="0" y="0"/>
-              <a:ext cx="3450503" cy="1050311"/>
+              <a:ext cx="3375979" cy="1050307"/>
             </a:xfrm>
             <a:custGeom>
               <a:avLst/>
@@ -6405,18 +6405,18 @@
               <a:cxnLst/>
               <a:rect r="r" b="b" t="t" l="l"/>
               <a:pathLst>
-                <a:path h="1050311" w="3450503">
+                <a:path h="1050307" w="3375979">
                   <a:moveTo>
                     <a:pt x="0" y="0"/>
                   </a:moveTo>
                   <a:lnTo>
-                    <a:pt x="3450503" y="0"/>
-                  </a:lnTo>
-                  <a:lnTo>
-                    <a:pt x="3450503" y="1050311"/>
-                  </a:lnTo>
-                  <a:lnTo>
-                    <a:pt x="0" y="1050311"/>
+                    <a:pt x="3375979" y="0"/>
+                  </a:lnTo>
+                  <a:lnTo>
+                    <a:pt x="3375979" y="1050307"/>
+                  </a:lnTo>
+                  <a:lnTo>
+                    <a:pt x="0" y="1050307"/>
                   </a:lnTo>
                   <a:close/>
                 </a:path>
@@ -6427,7 +6427,7 @@
                 <a:alphaModFix amt="0"/>
               </a:blip>
               <a:stretch>
-                <a:fillRect l="0" t="-14012" r="0" b="-14012"/>
+                <a:fillRect l="0" t="-14012" r="-2207" b="-14013"/>
               </a:stretch>
             </a:blipFill>
           </p:spPr>
@@ -6441,7 +6441,7 @@
           <p:spPr>
             <a:xfrm>
               <a:off x="0" y="-9525"/>
-              <a:ext cx="3450501" cy="1059840"/>
+              <a:ext cx="3375978" cy="1059836"/>
             </a:xfrm>
             <a:prstGeom prst="rect">
               <a:avLst/>
@@ -6480,10 +6480,10 @@
         </p:nvGrpSpPr>
         <p:grpSpPr>
           <a:xfrm rot="0">
-            <a:off x="11700367" y="2789053"/>
-            <a:ext cx="2587876" cy="751570"/>
+            <a:off x="14482732" y="2789053"/>
+            <a:ext cx="3873084" cy="751580"/>
             <a:chOff x="0" y="0"/>
-            <a:chExt cx="3450501" cy="1002094"/>
+            <a:chExt cx="5164112" cy="1002106"/>
           </a:xfrm>
         </p:grpSpPr>
         <p:sp>
@@ -6495,7 +6495,7 @@
           <p:spPr>
             <a:xfrm flipH="false" flipV="false" rot="0">
               <a:off x="0" y="0"/>
-              <a:ext cx="3450463" cy="1002030"/>
+              <a:ext cx="5164074" cy="1002043"/>
             </a:xfrm>
             <a:custGeom>
               <a:avLst/>
@@ -6504,18 +6504,18 @@
               <a:cxnLst/>
               <a:rect r="r" b="b" t="t" l="l"/>
               <a:pathLst>
-                <a:path h="1002030" w="3450463">
+                <a:path h="1002043" w="5164074">
                   <a:moveTo>
                     <a:pt x="0" y="0"/>
                   </a:moveTo>
                   <a:lnTo>
-                    <a:pt x="3450463" y="0"/>
-                  </a:lnTo>
-                  <a:lnTo>
-                    <a:pt x="3450463" y="1002030"/>
-                  </a:lnTo>
-                  <a:lnTo>
-                    <a:pt x="0" y="1002030"/>
+                    <a:pt x="5164074" y="0"/>
+                  </a:lnTo>
+                  <a:lnTo>
+                    <a:pt x="5164074" y="1002043"/>
+                  </a:lnTo>
+                  <a:lnTo>
+                    <a:pt x="0" y="1002043"/>
                   </a:lnTo>
                   <a:close/>
                 </a:path>
@@ -6535,10 +6535,10 @@
         </p:nvGrpSpPr>
         <p:grpSpPr>
           <a:xfrm rot="0">
-            <a:off x="11700367" y="2752896"/>
-            <a:ext cx="2587876" cy="787737"/>
+            <a:off x="14482732" y="2807137"/>
+            <a:ext cx="3873084" cy="733485"/>
             <a:chOff x="0" y="0"/>
-            <a:chExt cx="3450501" cy="1050315"/>
+            <a:chExt cx="5164112" cy="977980"/>
           </a:xfrm>
         </p:grpSpPr>
         <p:sp>
@@ -6550,7 +6550,7 @@
           <p:spPr>
             <a:xfrm flipH="false" flipV="false" rot="0">
               <a:off x="0" y="0"/>
-              <a:ext cx="3450503" cy="1050311"/>
+              <a:ext cx="5164112" cy="977976"/>
             </a:xfrm>
             <a:custGeom>
               <a:avLst/>
@@ -6559,18 +6559,18 @@
               <a:cxnLst/>
               <a:rect r="r" b="b" t="t" l="l"/>
               <a:pathLst>
-                <a:path h="1050311" w="3450503">
+                <a:path h="977976" w="5164112">
                   <a:moveTo>
                     <a:pt x="0" y="0"/>
                   </a:moveTo>
                   <a:lnTo>
-                    <a:pt x="3450503" y="0"/>
-                  </a:lnTo>
-                  <a:lnTo>
-                    <a:pt x="3450503" y="1050311"/>
-                  </a:lnTo>
-                  <a:lnTo>
-                    <a:pt x="0" y="1050311"/>
+                    <a:pt x="5164112" y="0"/>
+                  </a:lnTo>
+                  <a:lnTo>
+                    <a:pt x="5164112" y="977976"/>
+                  </a:lnTo>
+                  <a:lnTo>
+                    <a:pt x="0" y="977976"/>
                   </a:lnTo>
                   <a:close/>
                 </a:path>
@@ -6581,7 +6581,7 @@
                 <a:alphaModFix amt="0"/>
               </a:blip>
               <a:stretch>
-                <a:fillRect l="0" t="-14012" r="0" b="-14012"/>
+                <a:fillRect l="0" t="-49190" r="0" b="-56587"/>
               </a:stretch>
             </a:blipFill>
           </p:spPr>
@@ -6595,161 +6595,7 @@
           <p:spPr>
             <a:xfrm>
               <a:off x="0" y="-9525"/>
-              <a:ext cx="3450501" cy="1059840"/>
-            </a:xfrm>
-            <a:prstGeom prst="rect">
-              <a:avLst/>
-            </a:prstGeom>
-          </p:spPr>
-          <p:txBody>
-            <a:bodyPr anchor="ctr" rtlCol="false" tIns="0" lIns="0" bIns="0" rIns="0"/>
-            <a:lstStyle/>
-            <a:p>
-              <a:pPr algn="ctr">
-                <a:lnSpc>
-                  <a:spcPts val="1800"/>
-                </a:lnSpc>
-              </a:pPr>
-              <a:r>
-                <a:rPr lang="en-US" sz="1500" b="true">
-                  <a:solidFill>
-                    <a:srgbClr val="FFFFFF"/>
-                  </a:solidFill>
-                  <a:latin typeface="Montserrat Bold"/>
-                  <a:ea typeface="Montserrat Bold"/>
-                  <a:cs typeface="Montserrat Bold"/>
-                  <a:sym typeface="Montserrat Bold"/>
-                </a:rPr>
-                <a:t>Частота</a:t>
-              </a:r>
-            </a:p>
-          </p:txBody>
-        </p:sp>
-      </p:grpSp>
-      <p:grpSp>
-        <p:nvGrpSpPr>
-          <p:cNvPr name="Group 34" id="34"/>
-          <p:cNvGrpSpPr/>
-          <p:nvPr/>
-        </p:nvGrpSpPr>
-        <p:grpSpPr>
-          <a:xfrm rot="0">
-            <a:off x="14393018" y="2789053"/>
-            <a:ext cx="3873084" cy="751570"/>
-            <a:chOff x="0" y="0"/>
-            <a:chExt cx="5164112" cy="1002094"/>
-          </a:xfrm>
-        </p:grpSpPr>
-        <p:sp>
-          <p:nvSpPr>
-            <p:cNvPr name="Freeform 35" id="35"/>
-            <p:cNvSpPr/>
-            <p:nvPr/>
-          </p:nvSpPr>
-          <p:spPr>
-            <a:xfrm flipH="false" flipV="false" rot="0">
-              <a:off x="0" y="0"/>
-              <a:ext cx="5164074" cy="1002030"/>
-            </a:xfrm>
-            <a:custGeom>
-              <a:avLst/>
-              <a:gdLst/>
-              <a:ahLst/>
-              <a:cxnLst/>
-              <a:rect r="r" b="b" t="t" l="l"/>
-              <a:pathLst>
-                <a:path h="1002030" w="5164074">
-                  <a:moveTo>
-                    <a:pt x="0" y="0"/>
-                  </a:moveTo>
-                  <a:lnTo>
-                    <a:pt x="5164074" y="0"/>
-                  </a:lnTo>
-                  <a:lnTo>
-                    <a:pt x="5164074" y="1002030"/>
-                  </a:lnTo>
-                  <a:lnTo>
-                    <a:pt x="0" y="1002030"/>
-                  </a:lnTo>
-                  <a:close/>
-                </a:path>
-              </a:pathLst>
-            </a:custGeom>
-            <a:solidFill>
-              <a:srgbClr val="00509F"/>
-            </a:solidFill>
-          </p:spPr>
-        </p:sp>
-      </p:grpSp>
-      <p:grpSp>
-        <p:nvGrpSpPr>
-          <p:cNvPr name="Group 36" id="36"/>
-          <p:cNvGrpSpPr/>
-          <p:nvPr/>
-        </p:nvGrpSpPr>
-        <p:grpSpPr>
-          <a:xfrm rot="0">
-            <a:off x="14393018" y="2752896"/>
-            <a:ext cx="3873084" cy="787737"/>
-            <a:chOff x="0" y="0"/>
-            <a:chExt cx="5164112" cy="1050315"/>
-          </a:xfrm>
-        </p:grpSpPr>
-        <p:sp>
-          <p:nvSpPr>
-            <p:cNvPr name="Freeform 37" id="37"/>
-            <p:cNvSpPr/>
-            <p:nvPr/>
-          </p:nvSpPr>
-          <p:spPr>
-            <a:xfrm flipH="false" flipV="false" rot="0">
-              <a:off x="0" y="0"/>
-              <a:ext cx="5164112" cy="1050311"/>
-            </a:xfrm>
-            <a:custGeom>
-              <a:avLst/>
-              <a:gdLst/>
-              <a:ahLst/>
-              <a:cxnLst/>
-              <a:rect r="r" b="b" t="t" l="l"/>
-              <a:pathLst>
-                <a:path h="1050311" w="5164112">
-                  <a:moveTo>
-                    <a:pt x="0" y="0"/>
-                  </a:moveTo>
-                  <a:lnTo>
-                    <a:pt x="5164112" y="0"/>
-                  </a:lnTo>
-                  <a:lnTo>
-                    <a:pt x="5164112" y="1050311"/>
-                  </a:lnTo>
-                  <a:lnTo>
-                    <a:pt x="0" y="1050311"/>
-                  </a:lnTo>
-                  <a:close/>
-                </a:path>
-              </a:pathLst>
-            </a:custGeom>
-            <a:blipFill>
-              <a:blip r:embed="rId3">
-                <a:alphaModFix amt="0"/>
-              </a:blip>
-              <a:stretch>
-                <a:fillRect l="0" t="-45802" r="0" b="-45803"/>
-              </a:stretch>
-            </a:blipFill>
-          </p:spPr>
-        </p:sp>
-        <p:sp>
-          <p:nvSpPr>
-            <p:cNvPr name="TextBox 38" id="38"/>
-            <p:cNvSpPr txBox="true"/>
-            <p:nvPr/>
-          </p:nvSpPr>
-          <p:spPr>
-            <a:xfrm>
-              <a:off x="0" y="-9525"/>
-              <a:ext cx="5164112" cy="1059840"/>
+              <a:ext cx="5164112" cy="987505"/>
             </a:xfrm>
             <a:prstGeom prst="rect">
               <a:avLst/>
@@ -6782,7 +6628,7 @@
       </p:grpSp>
       <p:grpSp>
         <p:nvGrpSpPr>
-          <p:cNvPr name="Group 39" id="39"/>
+          <p:cNvPr name="Group 34" id="34"/>
           <p:cNvGrpSpPr/>
           <p:nvPr/>
         </p:nvGrpSpPr>
@@ -6796,7 +6642,7 @@
         </p:grpSpPr>
         <p:sp>
           <p:nvSpPr>
-            <p:cNvPr name="Freeform 40" id="40"/>
+            <p:cNvPr name="Freeform 35" id="35"/>
             <p:cNvSpPr/>
             <p:nvPr/>
           </p:nvSpPr>
@@ -6846,61 +6692,9 @@
           </p:spPr>
         </p:sp>
       </p:grpSp>
-      <p:sp>
-        <p:nvSpPr>
-          <p:cNvPr name="Freeform 41" id="41"/>
-          <p:cNvSpPr/>
-          <p:nvPr/>
-        </p:nvSpPr>
-        <p:spPr>
-          <a:xfrm flipH="false" flipV="false" rot="0">
-            <a:off x="9007716" y="3709894"/>
-            <a:ext cx="9280284" cy="327561"/>
-          </a:xfrm>
-          <a:custGeom>
-            <a:avLst/>
-            <a:gdLst/>
-            <a:ahLst/>
-            <a:cxnLst/>
-            <a:rect r="r" b="b" t="t" l="l"/>
-            <a:pathLst>
-              <a:path h="327561" w="9280284">
-                <a:moveTo>
-                  <a:pt x="0" y="0"/>
-                </a:moveTo>
-                <a:lnTo>
-                  <a:pt x="9280284" y="0"/>
-                </a:lnTo>
-                <a:lnTo>
-                  <a:pt x="9280284" y="327561"/>
-                </a:lnTo>
-                <a:lnTo>
-                  <a:pt x="0" y="327561"/>
-                </a:lnTo>
-                <a:lnTo>
-                  <a:pt x="0" y="0"/>
-                </a:lnTo>
-                <a:close/>
-              </a:path>
-            </a:pathLst>
-          </a:custGeom>
-          <a:blipFill>
-            <a:blip r:embed="rId4">
-              <a:extLst>
-                <a:ext uri="{96DAC541-7B7A-43D3-8B79-37D633B846F1}">
-                  <asvg:svgBlip xmlns:asvg="http://schemas.microsoft.com/office/drawing/2016/SVG/main" r:embed="rId5"/>
-                </a:ext>
-              </a:extLst>
-            </a:blip>
-            <a:stretch>
-              <a:fillRect l="0" t="0" r="0" b="0"/>
-            </a:stretch>
-          </a:blipFill>
-        </p:spPr>
-      </p:sp>
       <p:grpSp>
         <p:nvGrpSpPr>
-          <p:cNvPr name="Group 42" id="42"/>
+          <p:cNvPr name="Group 36" id="36"/>
           <p:cNvGrpSpPr/>
           <p:nvPr/>
         </p:nvGrpSpPr>
@@ -6914,7 +6708,7 @@
         </p:grpSpPr>
         <p:sp>
           <p:nvSpPr>
-            <p:cNvPr name="Freeform 43" id="43"/>
+            <p:cNvPr name="Freeform 37" id="37"/>
             <p:cNvSpPr/>
             <p:nvPr/>
           </p:nvSpPr>
@@ -6951,7 +6745,7 @@
               </a:pathLst>
             </a:custGeom>
             <a:blipFill>
-              <a:blip r:embed="rId6"/>
+              <a:blip r:embed="rId4"/>
               <a:stretch>
                 <a:fillRect l="0" t="0" r="0" b="0"/>
               </a:stretch>
@@ -6961,7 +6755,7 @@
       </p:grpSp>
       <p:sp>
         <p:nvSpPr>
-          <p:cNvPr name="Freeform 44" id="44"/>
+          <p:cNvPr name="Freeform 38" id="38"/>
           <p:cNvSpPr/>
           <p:nvPr/>
         </p:nvSpPr>
@@ -6998,10 +6792,10 @@
             </a:pathLst>
           </a:custGeom>
           <a:blipFill>
-            <a:blip r:embed="rId7">
+            <a:blip r:embed="rId5">
               <a:extLst>
                 <a:ext uri="{96DAC541-7B7A-43D3-8B79-37D633B846F1}">
-                  <asvg:svgBlip xmlns:asvg="http://schemas.microsoft.com/office/drawing/2016/SVG/main" r:embed="rId8"/>
+                  <asvg:svgBlip xmlns:asvg="http://schemas.microsoft.com/office/drawing/2016/SVG/main" r:embed="rId6"/>
                 </a:ext>
               </a:extLst>
             </a:blip>
@@ -7013,7 +6807,7 @@
       </p:sp>
       <p:sp>
         <p:nvSpPr>
-          <p:cNvPr name="Freeform 45" id="45"/>
+          <p:cNvPr name="Freeform 39" id="39"/>
           <p:cNvSpPr/>
           <p:nvPr/>
         </p:nvSpPr>
@@ -7050,10 +6844,10 @@
             </a:pathLst>
           </a:custGeom>
           <a:blipFill>
-            <a:blip r:embed="rId7">
+            <a:blip r:embed="rId5">
               <a:extLst>
                 <a:ext uri="{96DAC541-7B7A-43D3-8B79-37D633B846F1}">
-                  <asvg:svgBlip xmlns:asvg="http://schemas.microsoft.com/office/drawing/2016/SVG/main" r:embed="rId8"/>
+                  <asvg:svgBlip xmlns:asvg="http://schemas.microsoft.com/office/drawing/2016/SVG/main" r:embed="rId6"/>
                 </a:ext>
               </a:extLst>
             </a:blip>
@@ -7065,7 +6859,7 @@
       </p:sp>
       <p:grpSp>
         <p:nvGrpSpPr>
-          <p:cNvPr name="Group 46" id="46"/>
+          <p:cNvPr name="Group 40" id="40"/>
           <p:cNvGrpSpPr/>
           <p:nvPr/>
         </p:nvGrpSpPr>
@@ -7079,7 +6873,7 @@
         </p:grpSpPr>
         <p:sp>
           <p:nvSpPr>
-            <p:cNvPr name="Freeform 47" id="47"/>
+            <p:cNvPr name="Freeform 41" id="41"/>
             <p:cNvSpPr/>
             <p:nvPr/>
           </p:nvSpPr>
@@ -7116,7 +6910,7 @@
               </a:pathLst>
             </a:custGeom>
             <a:blipFill>
-              <a:blip r:embed="rId9"/>
+              <a:blip r:embed="rId7"/>
               <a:stretch>
                 <a:fillRect l="-970" t="0" r="-972" b="0"/>
               </a:stretch>
@@ -7126,7 +6920,7 @@
       </p:grpSp>
       <p:sp>
         <p:nvSpPr>
-          <p:cNvPr name="Freeform 48" id="48"/>
+          <p:cNvPr name="Freeform 42" id="42"/>
           <p:cNvSpPr/>
           <p:nvPr/>
         </p:nvSpPr>
@@ -7163,7 +6957,7 @@
             </a:pathLst>
           </a:custGeom>
           <a:blipFill>
-            <a:blip r:embed="rId10"/>
+            <a:blip r:embed="rId8"/>
             <a:stretch>
               <a:fillRect l="0" t="0" r="0" b="0"/>
             </a:stretch>
@@ -7172,7 +6966,7 @@
       </p:sp>
       <p:sp>
         <p:nvSpPr>
-          <p:cNvPr name="Freeform 49" id="49"/>
+          <p:cNvPr name="Freeform 43" id="43"/>
           <p:cNvSpPr/>
           <p:nvPr/>
         </p:nvSpPr>
@@ -7209,7 +7003,7 @@
             </a:pathLst>
           </a:custGeom>
           <a:blipFill>
-            <a:blip r:embed="rId11"/>
+            <a:blip r:embed="rId9"/>
             <a:stretch>
               <a:fillRect l="0" t="0" r="0" b="0"/>
             </a:stretch>
@@ -7218,7 +7012,7 @@
       </p:sp>
       <p:sp>
         <p:nvSpPr>
-          <p:cNvPr name="TextBox 50" id="50"/>
+          <p:cNvPr name="TextBox 44" id="44"/>
           <p:cNvSpPr txBox="true"/>
           <p:nvPr/>
         </p:nvSpPr>
@@ -7259,7 +7053,7 @@
       </p:sp>
       <p:grpSp>
         <p:nvGrpSpPr>
-          <p:cNvPr name="Group 51" id="51"/>
+          <p:cNvPr name="Group 45" id="45"/>
           <p:cNvGrpSpPr/>
           <p:nvPr/>
         </p:nvGrpSpPr>
@@ -7273,7 +7067,7 @@
         </p:grpSpPr>
         <p:sp>
           <p:nvSpPr>
-            <p:cNvPr name="Freeform 52" id="52"/>
+            <p:cNvPr name="Freeform 46" id="46"/>
             <p:cNvSpPr/>
             <p:nvPr/>
           </p:nvSpPr>
@@ -7310,7 +7104,7 @@
               </a:pathLst>
             </a:custGeom>
             <a:blipFill>
-              <a:blip r:embed="rId12"/>
+              <a:blip r:embed="rId10"/>
               <a:stretch>
                 <a:fillRect l="0" t="-1" r="-199721" b="-1318"/>
               </a:stretch>
@@ -7320,7 +7114,7 @@
       </p:grpSp>
       <p:grpSp>
         <p:nvGrpSpPr>
-          <p:cNvPr name="Group 53" id="53"/>
+          <p:cNvPr name="Group 47" id="47"/>
           <p:cNvGrpSpPr/>
           <p:nvPr/>
         </p:nvGrpSpPr>
@@ -7334,7 +7128,7 @@
         </p:grpSpPr>
         <p:sp>
           <p:nvSpPr>
-            <p:cNvPr name="Freeform 54" id="54"/>
+            <p:cNvPr name="Freeform 48" id="48"/>
             <p:cNvSpPr/>
             <p:nvPr/>
           </p:nvSpPr>
@@ -7371,12 +7165,265 @@
               </a:pathLst>
             </a:custGeom>
             <a:blipFill>
-              <a:blip r:embed="rId13"/>
+              <a:blip r:embed="rId11"/>
               <a:stretch>
                 <a:fillRect l="-53" t="0" r="-53" b="0"/>
               </a:stretch>
             </a:blipFill>
           </p:spPr>
+        </p:sp>
+      </p:grpSp>
+      <p:grpSp>
+        <p:nvGrpSpPr>
+          <p:cNvPr name="Group 49" id="49"/>
+          <p:cNvGrpSpPr/>
+          <p:nvPr/>
+        </p:nvGrpSpPr>
+        <p:grpSpPr>
+          <a:xfrm rot="0">
+            <a:off x="11788086" y="2807137"/>
+            <a:ext cx="2587876" cy="733496"/>
+            <a:chOff x="0" y="0"/>
+            <a:chExt cx="3450501" cy="977995"/>
+          </a:xfrm>
+        </p:grpSpPr>
+        <p:sp>
+          <p:nvSpPr>
+            <p:cNvPr name="Freeform 50" id="50"/>
+            <p:cNvSpPr/>
+            <p:nvPr/>
+          </p:nvSpPr>
+          <p:spPr>
+            <a:xfrm flipH="false" flipV="false" rot="0">
+              <a:off x="0" y="0"/>
+              <a:ext cx="3450503" cy="977991"/>
+            </a:xfrm>
+            <a:custGeom>
+              <a:avLst/>
+              <a:gdLst/>
+              <a:ahLst/>
+              <a:cxnLst/>
+              <a:rect r="r" b="b" t="t" l="l"/>
+              <a:pathLst>
+                <a:path h="977991" w="3450503">
+                  <a:moveTo>
+                    <a:pt x="0" y="0"/>
+                  </a:moveTo>
+                  <a:lnTo>
+                    <a:pt x="3450503" y="0"/>
+                  </a:lnTo>
+                  <a:lnTo>
+                    <a:pt x="3450503" y="977991"/>
+                  </a:lnTo>
+                  <a:lnTo>
+                    <a:pt x="0" y="977991"/>
+                  </a:lnTo>
+                  <a:close/>
+                </a:path>
+              </a:pathLst>
+            </a:custGeom>
+            <a:blipFill>
+              <a:blip r:embed="rId3">
+                <a:alphaModFix amt="0"/>
+              </a:blip>
+              <a:stretch>
+                <a:fillRect l="0" t="-15048" r="0" b="-22443"/>
+              </a:stretch>
+            </a:blipFill>
+          </p:spPr>
+        </p:sp>
+        <p:sp>
+          <p:nvSpPr>
+            <p:cNvPr name="TextBox 51" id="51"/>
+            <p:cNvSpPr txBox="true"/>
+            <p:nvPr/>
+          </p:nvSpPr>
+          <p:spPr>
+            <a:xfrm>
+              <a:off x="0" y="-9525"/>
+              <a:ext cx="3450501" cy="987520"/>
+            </a:xfrm>
+            <a:prstGeom prst="rect">
+              <a:avLst/>
+            </a:prstGeom>
+          </p:spPr>
+          <p:txBody>
+            <a:bodyPr anchor="ctr" rtlCol="false" tIns="0" lIns="0" bIns="0" rIns="0"/>
+            <a:lstStyle/>
+            <a:p>
+              <a:pPr algn="ctr">
+                <a:lnSpc>
+                  <a:spcPts val="1800"/>
+                </a:lnSpc>
+              </a:pPr>
+              <a:r>
+                <a:rPr lang="en-US" sz="1500" b="true">
+                  <a:solidFill>
+                    <a:srgbClr val="FFFFFF"/>
+                  </a:solidFill>
+                  <a:latin typeface="Montserrat Bold"/>
+                  <a:ea typeface="Montserrat Bold"/>
+                  <a:cs typeface="Montserrat Bold"/>
+                  <a:sym typeface="Montserrat Bold"/>
+                </a:rPr>
+                <a:t>Спектральный анализ</a:t>
+              </a:r>
+            </a:p>
+          </p:txBody>
+        </p:sp>
+      </p:grpSp>
+      <p:grpSp>
+        <p:nvGrpSpPr>
+          <p:cNvPr name="Group 52" id="52"/>
+          <p:cNvGrpSpPr/>
+          <p:nvPr/>
+        </p:nvGrpSpPr>
+        <p:grpSpPr>
+          <a:xfrm rot="0">
+            <a:off x="6500117" y="2789053"/>
+            <a:ext cx="2587876" cy="751580"/>
+            <a:chOff x="0" y="0"/>
+            <a:chExt cx="3450501" cy="1002106"/>
+          </a:xfrm>
+        </p:grpSpPr>
+        <p:sp>
+          <p:nvSpPr>
+            <p:cNvPr name="Freeform 53" id="53"/>
+            <p:cNvSpPr/>
+            <p:nvPr/>
+          </p:nvSpPr>
+          <p:spPr>
+            <a:xfrm flipH="false" flipV="false" rot="0">
+              <a:off x="0" y="0"/>
+              <a:ext cx="3450463" cy="1002043"/>
+            </a:xfrm>
+            <a:custGeom>
+              <a:avLst/>
+              <a:gdLst/>
+              <a:ahLst/>
+              <a:cxnLst/>
+              <a:rect r="r" b="b" t="t" l="l"/>
+              <a:pathLst>
+                <a:path h="1002043" w="3450463">
+                  <a:moveTo>
+                    <a:pt x="0" y="0"/>
+                  </a:moveTo>
+                  <a:lnTo>
+                    <a:pt x="3450463" y="0"/>
+                  </a:lnTo>
+                  <a:lnTo>
+                    <a:pt x="3450463" y="1002043"/>
+                  </a:lnTo>
+                  <a:lnTo>
+                    <a:pt x="0" y="1002043"/>
+                  </a:lnTo>
+                  <a:close/>
+                </a:path>
+              </a:pathLst>
+            </a:custGeom>
+            <a:solidFill>
+              <a:srgbClr val="00509F"/>
+            </a:solidFill>
+          </p:spPr>
+        </p:sp>
+      </p:grpSp>
+      <p:grpSp>
+        <p:nvGrpSpPr>
+          <p:cNvPr name="Group 54" id="54"/>
+          <p:cNvGrpSpPr/>
+          <p:nvPr/>
+        </p:nvGrpSpPr>
+        <p:grpSpPr>
+          <a:xfrm rot="0">
+            <a:off x="6500117" y="2909185"/>
+            <a:ext cx="2587876" cy="529400"/>
+            <a:chOff x="0" y="0"/>
+            <a:chExt cx="3450501" cy="705866"/>
+          </a:xfrm>
+        </p:grpSpPr>
+        <p:sp>
+          <p:nvSpPr>
+            <p:cNvPr name="Freeform 55" id="55"/>
+            <p:cNvSpPr/>
+            <p:nvPr/>
+          </p:nvSpPr>
+          <p:spPr>
+            <a:xfrm flipH="false" flipV="false" rot="0">
+              <a:off x="0" y="0"/>
+              <a:ext cx="3450503" cy="705863"/>
+            </a:xfrm>
+            <a:custGeom>
+              <a:avLst/>
+              <a:gdLst/>
+              <a:ahLst/>
+              <a:cxnLst/>
+              <a:rect r="r" b="b" t="t" l="l"/>
+              <a:pathLst>
+                <a:path h="705863" w="3450503">
+                  <a:moveTo>
+                    <a:pt x="0" y="0"/>
+                  </a:moveTo>
+                  <a:lnTo>
+                    <a:pt x="3450503" y="0"/>
+                  </a:lnTo>
+                  <a:lnTo>
+                    <a:pt x="3450503" y="705863"/>
+                  </a:lnTo>
+                  <a:lnTo>
+                    <a:pt x="0" y="705863"/>
+                  </a:lnTo>
+                  <a:close/>
+                </a:path>
+              </a:pathLst>
+            </a:custGeom>
+            <a:blipFill>
+              <a:blip r:embed="rId3">
+                <a:alphaModFix amt="0"/>
+              </a:blip>
+              <a:stretch>
+                <a:fillRect l="0" t="-20850" r="0" b="-69648"/>
+              </a:stretch>
+            </a:blipFill>
+          </p:spPr>
+        </p:sp>
+        <p:sp>
+          <p:nvSpPr>
+            <p:cNvPr name="TextBox 56" id="56"/>
+            <p:cNvSpPr txBox="true"/>
+            <p:nvPr/>
+          </p:nvSpPr>
+          <p:spPr>
+            <a:xfrm>
+              <a:off x="0" y="-9525"/>
+              <a:ext cx="3450501" cy="715391"/>
+            </a:xfrm>
+            <a:prstGeom prst="rect">
+              <a:avLst/>
+            </a:prstGeom>
+          </p:spPr>
+          <p:txBody>
+            <a:bodyPr anchor="ctr" rtlCol="false" tIns="0" lIns="0" bIns="0" rIns="0"/>
+            <a:lstStyle/>
+            <a:p>
+              <a:pPr algn="ctr">
+                <a:lnSpc>
+                  <a:spcPts val="1800"/>
+                </a:lnSpc>
+              </a:pPr>
+              <a:r>
+                <a:rPr lang="en-US" sz="1500" b="true">
+                  <a:solidFill>
+                    <a:srgbClr val="FFFFFF"/>
+                  </a:solidFill>
+                  <a:latin typeface="Montserrat Bold"/>
+                  <a:ea typeface="Montserrat Bold"/>
+                  <a:cs typeface="Montserrat Bold"/>
+                  <a:sym typeface="Montserrat Bold"/>
+                </a:rPr>
+                <a:t>Извлечение пульсового сигнала</a:t>
+              </a:r>
+            </a:p>
+          </p:txBody>
         </p:sp>
       </p:grpSp>
     </p:spTree>
